--- a/Week08-Slides.pptx
+++ b/Week08-Slides.pptx
@@ -14826,7 +14826,7 @@
                   <a:srgbClr val="ECEFF4"/>
                 </a:solidFill>
               </a:rPr>
-              <a:t>•  JSON-RPC: initialize, negotiate capabilities, discover, then call.</a:t>
+              <a:t>•  JSON-RPC: each request carries protocol version and client capabilities in _meta; server/discover advertises server versions and capabilities.</a:t>
             </a:r>
           </a:p>
           <a:p>
